--- a/template1.pptx
+++ b/template1.pptx
@@ -6176,7 +6176,15 @@
           <a:p>
             <a:r>
               <a:rPr lang="en-US" sz="6600" dirty="0"/>
-              <a:t>My mental health is shit :3 :3</a:t>
+              <a:t>My mental health </a:t>
+            </a:r>
+            <a:r>
+              <a:rPr lang="en-US" sz="6600"/>
+              <a:t>is ok :</a:t>
+            </a:r>
+            <a:r>
+              <a:rPr lang="en-US" sz="6600" dirty="0"/>
+              <a:t>3 :3</a:t>
             </a:r>
             <a:endParaRPr lang="ru-RU" sz="6600" dirty="0"/>
           </a:p>
